--- a/Teaching/Compile Time Errrors/sessions/const_correctness.pptx
+++ b/Teaching/Compile Time Errrors/sessions/const_correctness.pptx
@@ -3701,7 +3701,7 @@
       </p:sp>
       <p:pic>
         <p:nvPicPr>
-          <p:cNvPr id="10" name="Image 0" descr="preencoded.png">    </p:cNvPr>
+          <p:cNvPr id="10" name="Image 0" descr="preencoded.png"/>
           <p:cNvPicPr>
             <a:picLocks noChangeAspect="1"/>
           </p:cNvPicPr>
@@ -3834,7 +3834,7 @@
       </p:sp>
       <p:pic>
         <p:nvPicPr>
-          <p:cNvPr id="14" name="Image 1" descr="preencoded.png">    </p:cNvPr>
+          <p:cNvPr id="14" name="Image 1" descr="preencoded.png"/>
           <p:cNvPicPr>
             <a:picLocks noChangeAspect="1"/>
           </p:cNvPicPr>
@@ -3967,7 +3967,7 @@
       </p:sp>
       <p:pic>
         <p:nvPicPr>
-          <p:cNvPr id="18" name="Image 2" descr="preencoded.png">    </p:cNvPr>
+          <p:cNvPr id="18" name="Image 2" descr="preencoded.png"/>
           <p:cNvPicPr>
             <a:picLocks noChangeAspect="1"/>
           </p:cNvPicPr>
@@ -4100,7 +4100,7 @@
       </p:sp>
       <p:pic>
         <p:nvPicPr>
-          <p:cNvPr id="22" name="Image 3" descr="preencoded.png">    </p:cNvPr>
+          <p:cNvPr id="22" name="Image 3" descr="preencoded.png"/>
           <p:cNvPicPr>
             <a:picLocks noChangeAspect="1"/>
           </p:cNvPicPr>
@@ -4418,7 +4418,7 @@
                 <a:ea typeface="Consolas" pitchFamily="34" charset="-122"/>
                 <a:cs typeface="Consolas" pitchFamily="34" charset="-120"/>
               </a:rPr>
-              <a:t>    double balance_ = 0.0;</a:t>
+              <a:t xml:space="preserve">    double balance_ = 0.0;</a:t>
             </a:r>
             <a:endParaRPr lang="en-US" sz="1000" dirty="0"/>
           </a:p>
@@ -4458,7 +4458,7 @@
                 <a:ea typeface="Consolas" pitchFamily="34" charset="-122"/>
                 <a:cs typeface="Consolas" pitchFamily="34" charset="-120"/>
               </a:rPr>
-              <a:t>    double get_balance() const {  // Promises not to modify *this</a:t>
+              <a:t xml:space="preserve">    double get_balance() const {  // Promises not to modify *this</a:t>
             </a:r>
             <a:endParaRPr lang="en-US" sz="1000" dirty="0"/>
           </a:p>
@@ -4478,7 +4478,7 @@
                 <a:ea typeface="Consolas" pitchFamily="34" charset="-122"/>
                 <a:cs typeface="Consolas" pitchFamily="34" charset="-120"/>
               </a:rPr>
-              <a:t>        return balance_;</a:t>
+              <a:t xml:space="preserve">        return balance_;</a:t>
             </a:r>
             <a:endParaRPr lang="en-US" sz="1000" dirty="0"/>
           </a:p>
@@ -4498,7 +4498,7 @@
                 <a:ea typeface="Consolas" pitchFamily="34" charset="-122"/>
                 <a:cs typeface="Consolas" pitchFamily="34" charset="-120"/>
               </a:rPr>
-              <a:t>    }</a:t>
+              <a:t xml:space="preserve">    }</a:t>
             </a:r>
             <a:endParaRPr lang="en-US" sz="1000" dirty="0"/>
           </a:p>
@@ -4518,7 +4518,7 @@
                 <a:ea typeface="Consolas" pitchFamily="34" charset="-122"/>
                 <a:cs typeface="Consolas" pitchFamily="34" charset="-120"/>
               </a:rPr>
-              <a:t>    void deposit(double amount) { // May modify *this</a:t>
+              <a:t xml:space="preserve">    void deposit(double amount) { // May modify *this</a:t>
             </a:r>
             <a:endParaRPr lang="en-US" sz="1000" dirty="0"/>
           </a:p>
@@ -4538,7 +4538,7 @@
                 <a:ea typeface="Consolas" pitchFamily="34" charset="-122"/>
                 <a:cs typeface="Consolas" pitchFamily="34" charset="-120"/>
               </a:rPr>
-              <a:t>        balance_ += amount;</a:t>
+              <a:t xml:space="preserve">        balance_ += amount;</a:t>
             </a:r>
             <a:endParaRPr lang="en-US" sz="1000" dirty="0"/>
           </a:p>
@@ -4558,7 +4558,7 @@
                 <a:ea typeface="Consolas" pitchFamily="34" charset="-122"/>
                 <a:cs typeface="Consolas" pitchFamily="34" charset="-120"/>
               </a:rPr>
-              <a:t>    }</a:t>
+              <a:t xml:space="preserve">    }</a:t>
             </a:r>
             <a:endParaRPr lang="en-US" sz="1000" dirty="0"/>
           </a:p>
@@ -4853,7 +4853,7 @@
                 <a:ea typeface="Consolas" pitchFamily="34" charset="-122"/>
                 <a:cs typeface="Consolas" pitchFamily="34" charset="-120"/>
               </a:rPr>
-              <a:t>    double b = account.get_balance();  // OK: get_balance() is const</a:t>
+              <a:t xml:space="preserve">    double b = account.get_balance();  // OK: get_balance() is const</a:t>
             </a:r>
             <a:endParaRPr lang="en-US" sz="1000" dirty="0"/>
           </a:p>
@@ -4873,7 +4873,7 @@
                 <a:ea typeface="Consolas" pitchFamily="34" charset="-122"/>
                 <a:cs typeface="Consolas" pitchFamily="34" charset="-120"/>
               </a:rPr>
-              <a:t>    account.deposit(100);              // COMPILE ERROR: deposit() is non-const</a:t>
+              <a:t xml:space="preserve">    account.deposit(100);              // COMPILE ERROR: deposit() is non-const</a:t>
             </a:r>
             <a:endParaRPr lang="en-US" sz="1000" dirty="0"/>
           </a:p>
@@ -4948,7 +4948,7 @@
       </p:sp>
       <p:pic>
         <p:nvPicPr>
-          <p:cNvPr id="15" name="Image 0" descr="preencoded.png">    </p:cNvPr>
+          <p:cNvPr id="15" name="Image 0" descr="preencoded.png"/>
           <p:cNvPicPr>
             <a:picLocks noChangeAspect="1"/>
           </p:cNvPicPr>
@@ -5243,7 +5243,7 @@
                 <a:ea typeface="Consolas" pitchFamily="34" charset="-122"/>
                 <a:cs typeface="Consolas" pitchFamily="34" charset="-120"/>
               </a:rPr>
-              <a:t>    std::vector&lt;double&gt; data_;</a:t>
+              <a:t xml:space="preserve">    std::vector&lt;double&gt; data_;</a:t>
             </a:r>
             <a:endParaRPr lang="en-US" sz="1000" dirty="0"/>
           </a:p>
@@ -5263,7 +5263,7 @@
                 <a:ea typeface="Consolas" pitchFamily="34" charset="-122"/>
                 <a:cs typeface="Consolas" pitchFamily="34" charset="-120"/>
               </a:rPr>
-              <a:t>    int cols_;</a:t>
+              <a:t xml:space="preserve">    int cols_;</a:t>
             </a:r>
             <a:endParaRPr lang="en-US" sz="1000" dirty="0"/>
           </a:p>
@@ -5303,7 +5303,7 @@
                 <a:ea typeface="Consolas" pitchFamily="34" charset="-122"/>
                 <a:cs typeface="Consolas" pitchFamily="34" charset="-120"/>
               </a:rPr>
-              <a:t>    // Non-const overload: returns mutable reference</a:t>
+              <a:t xml:space="preserve">    // Non-const overload: returns mutable reference</a:t>
             </a:r>
             <a:endParaRPr lang="en-US" sz="1000" dirty="0"/>
           </a:p>
@@ -5323,7 +5323,7 @@
                 <a:ea typeface="Consolas" pitchFamily="34" charset="-122"/>
                 <a:cs typeface="Consolas" pitchFamily="34" charset="-120"/>
               </a:rPr>
-              <a:t>    double&amp; operator()(int r, int c) {</a:t>
+              <a:t xml:space="preserve">    double&amp; operator()(int r, int c) {</a:t>
             </a:r>
             <a:endParaRPr lang="en-US" sz="1000" dirty="0"/>
           </a:p>
@@ -5343,7 +5343,7 @@
                 <a:ea typeface="Consolas" pitchFamily="34" charset="-122"/>
                 <a:cs typeface="Consolas" pitchFamily="34" charset="-120"/>
               </a:rPr>
-              <a:t>        return data_[r * cols_ + c];</a:t>
+              <a:t xml:space="preserve">        return data_[r * cols_ + c];</a:t>
             </a:r>
             <a:endParaRPr lang="en-US" sz="1000" dirty="0"/>
           </a:p>
@@ -5363,7 +5363,7 @@
                 <a:ea typeface="Consolas" pitchFamily="34" charset="-122"/>
                 <a:cs typeface="Consolas" pitchFamily="34" charset="-120"/>
               </a:rPr>
-              <a:t>    }</a:t>
+              <a:t xml:space="preserve">    }</a:t>
             </a:r>
             <a:endParaRPr lang="en-US" sz="1000" dirty="0"/>
           </a:p>
@@ -5383,7 +5383,7 @@
                 <a:ea typeface="Consolas" pitchFamily="34" charset="-122"/>
                 <a:cs typeface="Consolas" pitchFamily="34" charset="-120"/>
               </a:rPr>
-              <a:t>    // Const overload: returns const reference</a:t>
+              <a:t xml:space="preserve">    // Const overload: returns const reference</a:t>
             </a:r>
             <a:endParaRPr lang="en-US" sz="1000" dirty="0"/>
           </a:p>
@@ -5403,7 +5403,7 @@
                 <a:ea typeface="Consolas" pitchFamily="34" charset="-122"/>
                 <a:cs typeface="Consolas" pitchFamily="34" charset="-120"/>
               </a:rPr>
-              <a:t>    const double&amp; operator()(int r, int c) const {</a:t>
+              <a:t xml:space="preserve">    const double&amp; operator()(int r, int c) const {</a:t>
             </a:r>
             <a:endParaRPr lang="en-US" sz="1000" dirty="0"/>
           </a:p>
@@ -5423,7 +5423,7 @@
                 <a:ea typeface="Consolas" pitchFamily="34" charset="-122"/>
                 <a:cs typeface="Consolas" pitchFamily="34" charset="-120"/>
               </a:rPr>
-              <a:t>        return data_[r * cols_ + c];</a:t>
+              <a:t xml:space="preserve">        return data_[r * cols_ + c];</a:t>
             </a:r>
             <a:endParaRPr lang="en-US" sz="1000" dirty="0"/>
           </a:p>
@@ -5443,7 +5443,7 @@
                 <a:ea typeface="Consolas" pitchFamily="34" charset="-122"/>
                 <a:cs typeface="Consolas" pitchFamily="34" charset="-120"/>
               </a:rPr>
-              <a:t>    }</a:t>
+              <a:t xml:space="preserve">    }</a:t>
             </a:r>
             <a:endParaRPr lang="en-US" sz="1000" dirty="0"/>
           </a:p>
@@ -5888,7 +5888,7 @@
                 <a:ea typeface="Consolas" pitchFamily="34" charset="-122"/>
                 <a:cs typeface="Consolas" pitchFamily="34" charset="-120"/>
               </a:rPr>
-              <a:t>    m(0, 0) = 1.0;       // non-const: returns double&amp;, assignment OK</a:t>
+              <a:t xml:space="preserve">    m(0, 0) = 1.0;       // non-const: returns double&amp;, assignment OK</a:t>
             </a:r>
             <a:endParaRPr lang="en-US" sz="1000" dirty="0"/>
           </a:p>
@@ -5957,7 +5957,7 @@
                 <a:ea typeface="Consolas" pitchFamily="34" charset="-122"/>
                 <a:cs typeface="Consolas" pitchFamily="34" charset="-120"/>
               </a:rPr>
-              <a:t>    return m(0, 0);       // const: returns const double&amp;</a:t>
+              <a:t xml:space="preserve">    return m(0, 0);       // const: returns const double&amp;</a:t>
             </a:r>
             <a:endParaRPr lang="en-US" sz="1000" dirty="0"/>
           </a:p>
@@ -5977,7 +5977,7 @@
                 <a:ea typeface="Consolas" pitchFamily="34" charset="-122"/>
                 <a:cs typeface="Consolas" pitchFamily="34" charset="-120"/>
               </a:rPr>
-              <a:t>    // m(0, 0) = 5.0;     // COMPILE ERROR: const double&amp; not assignable</a:t>
+              <a:t xml:space="preserve">    // m(0, 0) = 5.0;     // COMPILE ERROR: const double&amp; not assignable</a:t>
             </a:r>
             <a:endParaRPr lang="en-US" sz="1000" dirty="0"/>
           </a:p>
@@ -6237,7 +6237,7 @@
                 <a:ea typeface="Consolas" pitchFamily="34" charset="-122"/>
                 <a:cs typeface="Consolas" pitchFamily="34" charset="-120"/>
               </a:rPr>
-              <a:t>    mutable std::unordered_map&lt;int, Result&gt; cache_;  // mutable!</a:t>
+              <a:t xml:space="preserve">    mutable std::unordered_map&lt;int, Result&gt; cache_;  // mutable!</a:t>
             </a:r>
             <a:endParaRPr lang="en-US" sz="1000" dirty="0"/>
           </a:p>
@@ -6277,7 +6277,7 @@
                 <a:ea typeface="Consolas" pitchFamily="34" charset="-122"/>
                 <a:cs typeface="Consolas" pitchFamily="34" charset="-120"/>
               </a:rPr>
-              <a:t>    Result lookup(int key) const {    // const method</a:t>
+              <a:t xml:space="preserve">    Result lookup(int key) const {    // const method</a:t>
             </a:r>
             <a:endParaRPr lang="en-US" sz="1000" dirty="0"/>
           </a:p>
@@ -6297,7 +6297,7 @@
                 <a:ea typeface="Consolas" pitchFamily="34" charset="-122"/>
                 <a:cs typeface="Consolas" pitchFamily="34" charset="-120"/>
               </a:rPr>
-              <a:t>        if (auto it = cache_.find(key); it != cache_.end())</a:t>
+              <a:t xml:space="preserve">        if (auto it = cache_.find(key); it != cache_.end())</a:t>
             </a:r>
             <a:endParaRPr lang="en-US" sz="1000" dirty="0"/>
           </a:p>
@@ -6317,7 +6317,7 @@
                 <a:ea typeface="Consolas" pitchFamily="34" charset="-122"/>
                 <a:cs typeface="Consolas" pitchFamily="34" charset="-120"/>
               </a:rPr>
-              <a:t>            return it-&gt;second;        // Cache hit — return stored result</a:t>
+              <a:t xml:space="preserve">            return it-&gt;second;        // Cache hit — return stored result</a:t>
             </a:r>
             <a:endParaRPr lang="en-US" sz="1000" dirty="0"/>
           </a:p>
@@ -6337,7 +6337,7 @@
                 <a:ea typeface="Consolas" pitchFamily="34" charset="-122"/>
                 <a:cs typeface="Consolas" pitchFamily="34" charset="-120"/>
               </a:rPr>
-              <a:t>        Result r = expensive_compute(key);</a:t>
+              <a:t xml:space="preserve">        Result r = expensive_compute(key);</a:t>
             </a:r>
             <a:endParaRPr lang="en-US" sz="1000" dirty="0"/>
           </a:p>
@@ -6357,7 +6357,7 @@
                 <a:ea typeface="Consolas" pitchFamily="34" charset="-122"/>
                 <a:cs typeface="Consolas" pitchFamily="34" charset="-120"/>
               </a:rPr>
-              <a:t>        cache_[key] = r;              // OK: cache_ is mutable</a:t>
+              <a:t xml:space="preserve">        cache_[key] = r;              // OK: cache_ is mutable</a:t>
             </a:r>
             <a:endParaRPr lang="en-US" sz="1000" dirty="0"/>
           </a:p>
@@ -6377,7 +6377,7 @@
                 <a:ea typeface="Consolas" pitchFamily="34" charset="-122"/>
                 <a:cs typeface="Consolas" pitchFamily="34" charset="-120"/>
               </a:rPr>
-              <a:t>        return r;</a:t>
+              <a:t xml:space="preserve">        return r;</a:t>
             </a:r>
             <a:endParaRPr lang="en-US" sz="1000" dirty="0"/>
           </a:p>
@@ -6397,7 +6397,7 @@
                 <a:ea typeface="Consolas" pitchFamily="34" charset="-122"/>
                 <a:cs typeface="Consolas" pitchFamily="34" charset="-120"/>
               </a:rPr>
-              <a:t>    }</a:t>
+              <a:t xml:space="preserve">    }</a:t>
             </a:r>
             <a:endParaRPr lang="en-US" sz="1000" dirty="0"/>
           </a:p>
@@ -6768,7 +6768,7 @@
       </p:sp>
       <p:pic>
         <p:nvPicPr>
-          <p:cNvPr id="17" name="Image 0" descr="preencoded.png">    </p:cNvPr>
+          <p:cNvPr id="17" name="Image 0" descr="preencoded.png"/>
           <p:cNvPicPr>
             <a:picLocks noChangeAspect="1"/>
           </p:cNvPicPr>
@@ -7172,7 +7172,7 @@
                 <a:ea typeface="Consolas" pitchFamily="34" charset="-122"/>
                 <a:cs typeface="Consolas" pitchFamily="34" charset="-120"/>
               </a:rPr>
-              <a:t>    mutable std::mutex mutex_;                       // mutable mutex!</a:t>
+              <a:t xml:space="preserve">    mutable std::mutex mutex_;                       // mutable mutex!</a:t>
             </a:r>
             <a:endParaRPr lang="en-US" sz="1000" dirty="0"/>
           </a:p>
@@ -7192,7 +7192,7 @@
                 <a:ea typeface="Consolas" pitchFamily="34" charset="-122"/>
                 <a:cs typeface="Consolas" pitchFamily="34" charset="-120"/>
               </a:rPr>
-              <a:t>    mutable std::unordered_map&lt;int, Result&gt; cache_;  // mutable data</a:t>
+              <a:t xml:space="preserve">    mutable std::unordered_map&lt;int, Result&gt; cache_;  // mutable data</a:t>
             </a:r>
             <a:endParaRPr lang="en-US" sz="1000" dirty="0"/>
           </a:p>
@@ -7241,7 +7241,7 @@
                 <a:ea typeface="Consolas" pitchFamily="34" charset="-122"/>
                 <a:cs typeface="Consolas" pitchFamily="34" charset="-120"/>
               </a:rPr>
-              <a:t>    Result lookup(int key) const {</a:t>
+              <a:t xml:space="preserve">    Result lookup(int key) const {</a:t>
             </a:r>
             <a:endParaRPr lang="en-US" sz="1000" dirty="0"/>
           </a:p>
@@ -7261,7 +7261,7 @@
                 <a:ea typeface="Consolas" pitchFamily="34" charset="-122"/>
                 <a:cs typeface="Consolas" pitchFamily="34" charset="-120"/>
               </a:rPr>
-              <a:t>        std::lock_guard lock(mutex_);  // OK: mutex_ is mutable</a:t>
+              <a:t xml:space="preserve">        std::lock_guard lock(mutex_);  // OK: mutex_ is mutable</a:t>
             </a:r>
             <a:endParaRPr lang="en-US" sz="1000" dirty="0"/>
           </a:p>
@@ -7281,7 +7281,7 @@
                 <a:ea typeface="Consolas" pitchFamily="34" charset="-122"/>
                 <a:cs typeface="Consolas" pitchFamily="34" charset="-120"/>
               </a:rPr>
-              <a:t>        if (auto it = cache_.find(key); it != cache_.end())</a:t>
+              <a:t xml:space="preserve">        if (auto it = cache_.find(key); it != cache_.end())</a:t>
             </a:r>
             <a:endParaRPr lang="en-US" sz="1000" dirty="0"/>
           </a:p>
@@ -7301,7 +7301,7 @@
                 <a:ea typeface="Consolas" pitchFamily="34" charset="-122"/>
                 <a:cs typeface="Consolas" pitchFamily="34" charset="-120"/>
               </a:rPr>
-              <a:t>            return it-&gt;second;</a:t>
+              <a:t xml:space="preserve">            return it-&gt;second;</a:t>
             </a:r>
             <a:endParaRPr lang="en-US" sz="1000" dirty="0"/>
           </a:p>
@@ -7321,7 +7321,7 @@
                 <a:ea typeface="Consolas" pitchFamily="34" charset="-122"/>
                 <a:cs typeface="Consolas" pitchFamily="34" charset="-120"/>
               </a:rPr>
-              <a:t>        Result r = expensive_compute(key);</a:t>
+              <a:t xml:space="preserve">        Result r = expensive_compute(key);</a:t>
             </a:r>
             <a:endParaRPr lang="en-US" sz="1000" dirty="0"/>
           </a:p>
@@ -7341,7 +7341,7 @@
                 <a:ea typeface="Consolas" pitchFamily="34" charset="-122"/>
                 <a:cs typeface="Consolas" pitchFamily="34" charset="-120"/>
               </a:rPr>
-              <a:t>        cache_[key] = r;</a:t>
+              <a:t xml:space="preserve">        cache_[key] = r;</a:t>
             </a:r>
             <a:endParaRPr lang="en-US" sz="1000" dirty="0"/>
           </a:p>
@@ -7361,7 +7361,7 @@
                 <a:ea typeface="Consolas" pitchFamily="34" charset="-122"/>
                 <a:cs typeface="Consolas" pitchFamily="34" charset="-120"/>
               </a:rPr>
-              <a:t>        return r;</a:t>
+              <a:t xml:space="preserve">        return r;</a:t>
             </a:r>
             <a:endParaRPr lang="en-US" sz="1000" dirty="0"/>
           </a:p>
@@ -7381,7 +7381,7 @@
                 <a:ea typeface="Consolas" pitchFamily="34" charset="-122"/>
                 <a:cs typeface="Consolas" pitchFamily="34" charset="-120"/>
               </a:rPr>
-              <a:t>    }</a:t>
+              <a:t xml:space="preserve">    }</a:t>
             </a:r>
             <a:endParaRPr lang="en-US" sz="1000" dirty="0"/>
           </a:p>
@@ -7456,7 +7456,7 @@
       </p:sp>
       <p:pic>
         <p:nvPicPr>
-          <p:cNvPr id="9" name="Image 0" descr="preencoded.png">    </p:cNvPr>
+          <p:cNvPr id="9" name="Image 0" descr="preencoded.png"/>
           <p:cNvPicPr>
             <a:picLocks noChangeAspect="1"/>
           </p:cNvPicPr>
@@ -7569,7 +7569,7 @@
       </p:sp>
       <p:pic>
         <p:nvPicPr>
-          <p:cNvPr id="13" name="Image 1" descr="preencoded.png">    </p:cNvPr>
+          <p:cNvPr id="13" name="Image 1" descr="preencoded.png"/>
           <p:cNvPicPr>
             <a:picLocks noChangeAspect="1"/>
           </p:cNvPicPr>
@@ -8035,7 +8035,7 @@
                 <a:ea typeface="Consolas" pitchFamily="34" charset="-122"/>
                 <a:cs typeface="Consolas" pitchFamily="34" charset="-120"/>
               </a:rPr>
-              <a:t>    return x * x;</a:t>
+              <a:t xml:space="preserve">    return x * x;</a:t>
             </a:r>
             <a:endParaRPr lang="en-US" sz="1000" dirty="0"/>
           </a:p>
@@ -9056,7 +9056,7 @@
                 <a:ea typeface="Consolas" pitchFamily="34" charset="-122"/>
                 <a:cs typeface="Consolas" pitchFamily="34" charset="-120"/>
               </a:rPr>
-              <a:t>    int result = 1;</a:t>
+              <a:t xml:space="preserve">    int result = 1;</a:t>
             </a:r>
             <a:endParaRPr lang="en-US" sz="1000" dirty="0"/>
           </a:p>
@@ -9076,7 +9076,7 @@
                 <a:ea typeface="Consolas" pitchFamily="34" charset="-122"/>
                 <a:cs typeface="Consolas" pitchFamily="34" charset="-120"/>
               </a:rPr>
-              <a:t>    for (int i = 2; i &lt;= n; ++i)</a:t>
+              <a:t xml:space="preserve">    for (int i = 2; i &lt;= n; ++i)</a:t>
             </a:r>
             <a:endParaRPr lang="en-US" sz="1000" dirty="0"/>
           </a:p>
@@ -9096,7 +9096,7 @@
                 <a:ea typeface="Consolas" pitchFamily="34" charset="-122"/>
                 <a:cs typeface="Consolas" pitchFamily="34" charset="-120"/>
               </a:rPr>
-              <a:t>        result *= i;</a:t>
+              <a:t xml:space="preserve">        result *= i;</a:t>
             </a:r>
             <a:endParaRPr lang="en-US" sz="1000" dirty="0"/>
           </a:p>
@@ -9116,7 +9116,7 @@
                 <a:ea typeface="Consolas" pitchFamily="34" charset="-122"/>
                 <a:cs typeface="Consolas" pitchFamily="34" charset="-120"/>
               </a:rPr>
-              <a:t>    return result;</a:t>
+              <a:t xml:space="preserve">    return result;</a:t>
             </a:r>
             <a:endParaRPr lang="en-US" sz="1000" dirty="0"/>
           </a:p>
@@ -9304,7 +9304,7 @@
                 <a:ea typeface="Consolas" pitchFamily="34" charset="-122"/>
                 <a:cs typeface="Consolas" pitchFamily="34" charset="-120"/>
               </a:rPr>
-              <a:t>    string_view text) {</a:t>
+              <a:t xml:space="preserve">    string_view text) {</a:t>
             </a:r>
             <a:endParaRPr lang="en-US" sz="1000" dirty="0"/>
           </a:p>
@@ -9324,7 +9324,7 @@
                 <a:ea typeface="Consolas" pitchFamily="34" charset="-122"/>
                 <a:cs typeface="Consolas" pitchFamily="34" charset="-120"/>
               </a:rPr>
-              <a:t>  vector&lt;string_view&gt; words;</a:t>
+              <a:t xml:space="preserve">  vector&lt;string_view&gt; words;</a:t>
             </a:r>
             <a:endParaRPr lang="en-US" sz="1000" dirty="0"/>
           </a:p>
@@ -9344,7 +9344,7 @@
                 <a:ea typeface="Consolas" pitchFamily="34" charset="-122"/>
                 <a:cs typeface="Consolas" pitchFamily="34" charset="-120"/>
               </a:rPr>
-              <a:t>  // ... parse words ...</a:t>
+              <a:t xml:space="preserve">  // ... parse words ...</a:t>
             </a:r>
             <a:endParaRPr lang="en-US" sz="1000" dirty="0"/>
           </a:p>
@@ -9364,7 +9364,7 @@
                 <a:ea typeface="Consolas" pitchFamily="34" charset="-122"/>
                 <a:cs typeface="Consolas" pitchFamily="34" charset="-120"/>
               </a:rPr>
-              <a:t>  sort(words.begin(), words.end());</a:t>
+              <a:t xml:space="preserve">  sort(words.begin(), words.end());</a:t>
             </a:r>
             <a:endParaRPr lang="en-US" sz="1000" dirty="0"/>
           </a:p>
@@ -9384,7 +9384,7 @@
                 <a:ea typeface="Consolas" pitchFamily="34" charset="-122"/>
                 <a:cs typeface="Consolas" pitchFamily="34" charset="-120"/>
               </a:rPr>
-              <a:t>  auto last = unique(words.begin(),</a:t>
+              <a:t xml:space="preserve">  auto last = unique(words.begin(),</a:t>
             </a:r>
             <a:endParaRPr lang="en-US" sz="1000" dirty="0"/>
           </a:p>
@@ -9404,7 +9404,7 @@
                 <a:ea typeface="Consolas" pitchFamily="34" charset="-122"/>
                 <a:cs typeface="Consolas" pitchFamily="34" charset="-120"/>
               </a:rPr>
-              <a:t>                     words.end());</a:t>
+              <a:t xml:space="preserve">                     words.end());</a:t>
             </a:r>
             <a:endParaRPr lang="en-US" sz="1000" dirty="0"/>
           </a:p>
@@ -9424,7 +9424,7 @@
                 <a:ea typeface="Consolas" pitchFamily="34" charset="-122"/>
                 <a:cs typeface="Consolas" pitchFamily="34" charset="-120"/>
               </a:rPr>
-              <a:t>  return last - words.begin();</a:t>
+              <a:t xml:space="preserve">  return last - words.begin();</a:t>
             </a:r>
             <a:endParaRPr lang="en-US" sz="1000" dirty="0"/>
           </a:p>
@@ -9608,7 +9608,7 @@
       </p:sp>
       <p:pic>
         <p:nvPicPr>
-          <p:cNvPr id="15" name="Image 0" descr="preencoded.png">    </p:cNvPr>
+          <p:cNvPr id="15" name="Image 0" descr="preencoded.png"/>
           <p:cNvPicPr>
             <a:picLocks noChangeAspect="1"/>
           </p:cNvPicPr>
@@ -9945,7 +9945,7 @@
                 <a:ea typeface="Consolas" pitchFamily="34" charset="-122"/>
                 <a:cs typeface="Consolas" pitchFamily="34" charset="-120"/>
               </a:rPr>
-              <a:t>    return x * x;</a:t>
+              <a:t xml:space="preserve">    return x * x;</a:t>
             </a:r>
             <a:endParaRPr lang="en-US" sz="1000" dirty="0"/>
           </a:p>
@@ -10222,7 +10222,7 @@
                 <a:ea typeface="Consolas" pitchFamily="34" charset="-122"/>
                 <a:cs typeface="Consolas" pitchFamily="34" charset="-120"/>
               </a:rPr>
-              <a:t>    if (p &lt; 1 || p &gt; 65535)</a:t>
+              <a:t xml:space="preserve">    if (p &lt; 1 || p &gt; 65535)</a:t>
             </a:r>
             <a:endParaRPr lang="en-US" sz="1000" dirty="0"/>
           </a:p>
@@ -10242,7 +10242,7 @@
                 <a:ea typeface="Consolas" pitchFamily="34" charset="-122"/>
                 <a:cs typeface="Consolas" pitchFamily="34" charset="-120"/>
               </a:rPr>
-              <a:t>        throw "port out of range";</a:t>
+              <a:t xml:space="preserve">        throw "port out of range";</a:t>
             </a:r>
             <a:endParaRPr lang="en-US" sz="1000" dirty="0"/>
           </a:p>
@@ -10262,7 +10262,7 @@
                 <a:ea typeface="Consolas" pitchFamily="34" charset="-122"/>
                 <a:cs typeface="Consolas" pitchFamily="34" charset="-120"/>
               </a:rPr>
-              <a:t>    return /* byte swap */;</a:t>
+              <a:t xml:space="preserve">    return /* byte swap */;</a:t>
             </a:r>
             <a:endParaRPr lang="en-US" sz="1000" dirty="0"/>
           </a:p>
@@ -10983,7 +10983,7 @@
                 <a:ea typeface="Consolas" pitchFamily="34" charset="-122"/>
                 <a:cs typeface="Consolas" pitchFamily="34" charset="-120"/>
               </a:rPr>
-              <a:t>    ++request_count;  // OK</a:t>
+              <a:t xml:space="preserve">    ++request_count;  // OK</a:t>
             </a:r>
             <a:endParaRPr lang="en-US" sz="1000" dirty="0"/>
           </a:p>
@@ -11260,7 +11260,7 @@
                 <a:ea typeface="Consolas" pitchFamily="34" charset="-122"/>
                 <a:cs typeface="Consolas" pitchFamily="34" charset="-120"/>
               </a:rPr>
-              <a:t>  if constexpr (is_integral_v&lt;T&gt;)</a:t>
+              <a:t xml:space="preserve">  if constexpr (is_integral_v&lt;T&gt;)</a:t>
             </a:r>
             <a:endParaRPr lang="en-US" sz="1000" dirty="0"/>
           </a:p>
@@ -11280,7 +11280,7 @@
                 <a:ea typeface="Consolas" pitchFamily="34" charset="-122"/>
                 <a:cs typeface="Consolas" pitchFamily="34" charset="-120"/>
               </a:rPr>
-              <a:t>    return std::to_string(val);</a:t>
+              <a:t xml:space="preserve">    return std::to_string(val);</a:t>
             </a:r>
             <a:endParaRPr lang="en-US" sz="1000" dirty="0"/>
           </a:p>
@@ -11300,7 +11300,7 @@
                 <a:ea typeface="Consolas" pitchFamily="34" charset="-122"/>
                 <a:cs typeface="Consolas" pitchFamily="34" charset="-120"/>
               </a:rPr>
-              <a:t>  else</a:t>
+              <a:t xml:space="preserve">  else</a:t>
             </a:r>
             <a:endParaRPr lang="en-US" sz="1000" dirty="0"/>
           </a:p>
@@ -11320,7 +11320,7 @@
                 <a:ea typeface="Consolas" pitchFamily="34" charset="-122"/>
                 <a:cs typeface="Consolas" pitchFamily="34" charset="-120"/>
               </a:rPr>
-              <a:t>    return val.serialize();</a:t>
+              <a:t xml:space="preserve">    return val.serialize();</a:t>
             </a:r>
             <a:endParaRPr lang="en-US" sz="1000" dirty="0"/>
           </a:p>
@@ -12617,7 +12617,7 @@
                 <a:ea typeface="Consolas" pitchFamily="34" charset="-122"/>
                 <a:cs typeface="Consolas" pitchFamily="34" charset="-120"/>
               </a:rPr>
-              <a:t>    const auto config = load_config();  // Can't accidentally reassign</a:t>
+              <a:t xml:space="preserve">    const auto config = load_config();  // Can't accidentally reassign</a:t>
             </a:r>
             <a:endParaRPr lang="en-US" sz="1000" dirty="0"/>
           </a:p>
@@ -12637,7 +12637,7 @@
                 <a:ea typeface="Consolas" pitchFamily="34" charset="-122"/>
                 <a:cs typeface="Consolas" pitchFamily="34" charset="-120"/>
               </a:rPr>
-              <a:t>    </a:t>
+              <a:t xml:space="preserve">    </a:t>
             </a:r>
             <a:endParaRPr lang="en-US" sz="1000" dirty="0"/>
           </a:p>
@@ -12657,7 +12657,7 @@
                 <a:ea typeface="Consolas" pitchFamily="34" charset="-122"/>
                 <a:cs typeface="Consolas" pitchFamily="34" charset="-120"/>
               </a:rPr>
-              <a:t>    // config = other_config;  // COMPILE ERROR</a:t>
+              <a:t xml:space="preserve">    // config = other_config;  // COMPILE ERROR</a:t>
             </a:r>
             <a:endParaRPr lang="en-US" sz="1000" dirty="0"/>
           </a:p>
@@ -12677,7 +12677,7 @@
                 <a:ea typeface="Consolas" pitchFamily="34" charset="-122"/>
                 <a:cs typeface="Consolas" pitchFamily="34" charset="-120"/>
               </a:rPr>
-              <a:t>    </a:t>
+              <a:t xml:space="preserve">    </a:t>
             </a:r>
             <a:endParaRPr lang="en-US" sz="1000" dirty="0"/>
           </a:p>
@@ -12697,7 +12697,7 @@
                 <a:ea typeface="Consolas" pitchFamily="34" charset="-122"/>
                 <a:cs typeface="Consolas" pitchFamily="34" charset="-120"/>
               </a:rPr>
-              <a:t>    // Half the function uses one config, half uses another?</a:t>
+              <a:t xml:space="preserve">    // Half the function uses one config, half uses another?</a:t>
             </a:r>
             <a:endParaRPr lang="en-US" sz="1000" dirty="0"/>
           </a:p>
@@ -12717,7 +12717,7 @@
                 <a:ea typeface="Consolas" pitchFamily="34" charset="-122"/>
                 <a:cs typeface="Consolas" pitchFamily="34" charset="-120"/>
               </a:rPr>
-              <a:t>    // Not possible with const.</a:t>
+              <a:t xml:space="preserve">    // Not possible with const.</a:t>
             </a:r>
             <a:endParaRPr lang="en-US" sz="1000" dirty="0"/>
           </a:p>
@@ -12737,7 +12737,7 @@
                 <a:ea typeface="Consolas" pitchFamily="34" charset="-122"/>
                 <a:cs typeface="Consolas" pitchFamily="34" charset="-120"/>
               </a:rPr>
-              <a:t>    use(config);</a:t>
+              <a:t xml:space="preserve">    use(config);</a:t>
             </a:r>
             <a:endParaRPr lang="en-US" sz="1000" dirty="0"/>
           </a:p>
@@ -13052,7 +13052,7 @@
                 <a:ea typeface="Consolas" pitchFamily="34" charset="-122"/>
                 <a:cs typeface="Consolas" pitchFamily="34" charset="-120"/>
               </a:rPr>
-              <a:t>    process(r);  // Did process() modify r? Who knows.</a:t>
+              <a:t xml:space="preserve">    process(r);  // Did process() modify r? Who knows.</a:t>
             </a:r>
             <a:endParaRPr lang="en-US" sz="1000" dirty="0"/>
           </a:p>
@@ -13200,7 +13200,7 @@
                 <a:ea typeface="Consolas" pitchFamily="34" charset="-122"/>
                 <a:cs typeface="Consolas" pitchFamily="34" charset="-120"/>
               </a:rPr>
-              <a:t>    process(r);  // Compile error if process() modifies</a:t>
+              <a:t xml:space="preserve">    process(r);  // Compile error if process() modifies</a:t>
             </a:r>
             <a:endParaRPr lang="en-US" sz="1000" dirty="0"/>
           </a:p>
@@ -14261,7 +14261,7 @@
       </p:sp>
       <p:pic>
         <p:nvPicPr>
-          <p:cNvPr id="5" name="Image 0" descr="preencoded.png">    </p:cNvPr>
+          <p:cNvPr id="5" name="Image 0" descr="preencoded.png"/>
           <p:cNvPicPr>
             <a:picLocks noChangeAspect="1"/>
           </p:cNvPicPr>
@@ -14405,7 +14405,7 @@
                 <a:ea typeface="Consolas" pitchFamily="34" charset="-122"/>
                 <a:cs typeface="Consolas" pitchFamily="34" charset="-120"/>
               </a:rPr>
-              <a:t>    std::string category;</a:t>
+              <a:t xml:space="preserve">    std::string category;</a:t>
             </a:r>
             <a:endParaRPr lang="en-US" sz="1000" dirty="0"/>
           </a:p>
@@ -14425,7 +14425,7 @@
                 <a:ea typeface="Consolas" pitchFamily="34" charset="-122"/>
                 <a:cs typeface="Consolas" pitchFamily="34" charset="-120"/>
               </a:rPr>
-              <a:t>    double value;</a:t>
+              <a:t xml:space="preserve">    double value;</a:t>
             </a:r>
             <a:endParaRPr lang="en-US" sz="1000" dirty="0"/>
           </a:p>
@@ -14474,6 +14474,26 @@
                 <a:ea typeface="Consolas" pitchFamily="34" charset="-122"/>
                 <a:cs typeface="Consolas" pitchFamily="34" charset="-120"/>
               </a:rPr>
+              <a:t>// Precondition: records is non-empty</a:t>
+            </a:r>
+            <a:endParaRPr lang="en-US" sz="900" dirty="0"/>
+          </a:p>
+          <a:p>
+            <a:pPr indent="0" marL="0">
+              <a:lnSpc>
+                <a:spcPct val="115000"/>
+              </a:lnSpc>
+              <a:buNone/>
+            </a:pPr>
+            <a:r>
+              <a:rPr lang="en-US" sz="900" dirty="0">
+                <a:solidFill>
+                  <a:srgbClr val="D4D4D4"/>
+                </a:solidFill>
+                <a:latin typeface="Consolas" pitchFamily="49" charset="0"/>
+                <a:ea typeface="Consolas" pitchFamily="49" charset="0"/>
+                <a:cs typeface="Consolas" pitchFamily="49" charset="0"/>
+              </a:rPr>
               <a:t>double calculate_average(std::vector&lt;Record&gt;&amp; records) {</a:t>
             </a:r>
             <a:endParaRPr lang="en-US" sz="1000" dirty="0"/>
@@ -14494,7 +14514,7 @@
                 <a:ea typeface="Consolas" pitchFamily="34" charset="-122"/>
                 <a:cs typeface="Consolas" pitchFamily="34" charset="-120"/>
               </a:rPr>
-              <a:t>    for (auto&amp; r : records) {</a:t>
+              <a:t xml:space="preserve">    for (auto&amp; r : records) {</a:t>
             </a:r>
             <a:endParaRPr lang="en-US" sz="1000" dirty="0"/>
           </a:p>
@@ -14514,7 +14534,7 @@
                 <a:ea typeface="Consolas" pitchFamily="34" charset="-122"/>
                 <a:cs typeface="Consolas" pitchFamily="34" charset="-120"/>
               </a:rPr>
-              <a:t>        std::transform(r.category.begin(), r.category.end(),</a:t>
+              <a:t xml:space="preserve">        std::transform(r.category.begin(), r.category.end(),</a:t>
             </a:r>
             <a:endParaRPr lang="en-US" sz="1000" dirty="0"/>
           </a:p>
@@ -14534,7 +14554,7 @@
                 <a:ea typeface="Consolas" pitchFamily="34" charset="-122"/>
                 <a:cs typeface="Consolas" pitchFamily="34" charset="-120"/>
               </a:rPr>
-              <a:t>                       r.category.begin(),</a:t>
+              <a:t xml:space="preserve">                       r.category.begin(),</a:t>
             </a:r>
             <a:endParaRPr lang="en-US" sz="1000" dirty="0"/>
           </a:p>
@@ -14554,7 +14574,7 @@
                 <a:ea typeface="Consolas" pitchFamily="34" charset="-122"/>
                 <a:cs typeface="Consolas" pitchFamily="34" charset="-120"/>
               </a:rPr>
-              <a:t>                       [](unsigned char c) { return std::tolower(c); });</a:t>
+              <a:t xml:space="preserve">                       [](unsigned char c) { return static_cast&lt;char&gt;(std::tolower(c)); });</a:t>
             </a:r>
             <a:endParaRPr lang="en-US" sz="1000" dirty="0"/>
           </a:p>
@@ -14574,7 +14594,7 @@
                 <a:ea typeface="Consolas" pitchFamily="34" charset="-122"/>
                 <a:cs typeface="Consolas" pitchFamily="34" charset="-120"/>
               </a:rPr>
-              <a:t>    }</a:t>
+              <a:t xml:space="preserve">    }</a:t>
             </a:r>
             <a:endParaRPr lang="en-US" sz="1000" dirty="0"/>
           </a:p>
@@ -14594,7 +14614,7 @@
                 <a:ea typeface="Consolas" pitchFamily="34" charset="-122"/>
                 <a:cs typeface="Consolas" pitchFamily="34" charset="-120"/>
               </a:rPr>
-              <a:t>    double sum = 0;</a:t>
+              <a:t xml:space="preserve">    double sum = 0;</a:t>
             </a:r>
             <a:endParaRPr lang="en-US" sz="1000" dirty="0"/>
           </a:p>
@@ -14614,7 +14634,7 @@
                 <a:ea typeface="Consolas" pitchFamily="34" charset="-122"/>
                 <a:cs typeface="Consolas" pitchFamily="34" charset="-120"/>
               </a:rPr>
-              <a:t>    for (const auto&amp; r : records) sum += r.value;</a:t>
+              <a:t xml:space="preserve">    for (const auto&amp; r : records) sum += r.value;</a:t>
             </a:r>
             <a:endParaRPr lang="en-US" sz="1000" dirty="0"/>
           </a:p>
@@ -14634,7 +14654,7 @@
                 <a:ea typeface="Consolas" pitchFamily="34" charset="-122"/>
                 <a:cs typeface="Consolas" pitchFamily="34" charset="-120"/>
               </a:rPr>
-              <a:t>    return sum / records.size();</a:t>
+              <a:t xml:space="preserve">    return sum / records.size();</a:t>
             </a:r>
             <a:endParaRPr lang="en-US" sz="1000" dirty="0"/>
           </a:p>
@@ -15150,7 +15170,7 @@
                 <a:ea typeface="Consolas" pitchFamily="34" charset="-122"/>
                 <a:cs typeface="Consolas" pitchFamily="34" charset="-120"/>
               </a:rPr>
-              <a:t>    // v.push_back(nullptr);  // COMPILE ERROR: v is const</a:t>
+              <a:t xml:space="preserve">    // v.push_back(nullptr);  // COMPILE ERROR: v is const</a:t>
             </a:r>
             <a:endParaRPr lang="en-US" sz="1000" dirty="0"/>
           </a:p>
@@ -15170,7 +15190,7 @@
                 <a:ea typeface="Consolas" pitchFamily="34" charset="-122"/>
                 <a:cs typeface="Consolas" pitchFamily="34" charset="-120"/>
               </a:rPr>
-              <a:t>    // v.clear();             // COMPILE ERROR: v is const</a:t>
+              <a:t xml:space="preserve">    // v.clear();             // COMPILE ERROR: v is const</a:t>
             </a:r>
             <a:endParaRPr lang="en-US" sz="1000" dirty="0"/>
           </a:p>
@@ -15190,7 +15210,7 @@
                 <a:ea typeface="Consolas" pitchFamily="34" charset="-122"/>
                 <a:cs typeface="Consolas" pitchFamily="34" charset="-120"/>
               </a:rPr>
-              <a:t>    *v[0] = 42;              // COMPILES! v[0] is int* const, not const int*</a:t>
+              <a:t xml:space="preserve">    *v[0] = 42;              // COMPILES! v[0] is int* const, not const int*</a:t>
             </a:r>
             <a:endParaRPr lang="en-US" sz="1000" dirty="0"/>
           </a:p>
@@ -15299,7 +15319,7 @@
                 <a:ea typeface="Consolas" pitchFamily="34" charset="-122"/>
                 <a:cs typeface="Consolas" pitchFamily="34" charset="-120"/>
               </a:rPr>
-              <a:t>    const std::unique_ptr&lt;Config&gt; config_;  // const pointer, non-const pointee</a:t>
+              <a:t xml:space="preserve">    const std::unique_ptr&lt;Config&gt; config_;  // const pointer, non-const pointee</a:t>
             </a:r>
             <a:endParaRPr lang="en-US" sz="1000" dirty="0"/>
           </a:p>
@@ -15328,7 +15348,7 @@
                 <a:ea typeface="Consolas" pitchFamily="34" charset="-122"/>
                 <a:cs typeface="Consolas" pitchFamily="34" charset="-120"/>
               </a:rPr>
-              <a:t>    void reconfigure() {</a:t>
+              <a:t xml:space="preserve">    void reconfigure() {</a:t>
             </a:r>
             <a:endParaRPr lang="en-US" sz="1000" dirty="0"/>
           </a:p>
@@ -15348,7 +15368,7 @@
                 <a:ea typeface="Consolas" pitchFamily="34" charset="-122"/>
                 <a:cs typeface="Consolas" pitchFamily="34" charset="-120"/>
               </a:rPr>
-              <a:t>        // config_ = make_unique&lt;Config&gt;();  // COMPILE ERROR: can't reassign</a:t>
+              <a:t xml:space="preserve">        // config_ = make_unique&lt;Config&gt;();  // COMPILE ERROR: can't reassign</a:t>
             </a:r>
             <a:endParaRPr lang="en-US" sz="1000" dirty="0"/>
           </a:p>
@@ -15368,7 +15388,7 @@
                 <a:ea typeface="Consolas" pitchFamily="34" charset="-122"/>
                 <a:cs typeface="Consolas" pitchFamily="34" charset="-120"/>
               </a:rPr>
-              <a:t>        config_-&gt;timeout = 30;              // COMPILES: Config is mutable!</a:t>
+              <a:t xml:space="preserve">        config_-&gt;timeout = 30;              // COMPILES: Config is mutable!</a:t>
             </a:r>
             <a:endParaRPr lang="en-US" sz="1000" dirty="0"/>
           </a:p>
@@ -15388,7 +15408,7 @@
                 <a:ea typeface="Consolas" pitchFamily="34" charset="-122"/>
                 <a:cs typeface="Consolas" pitchFamily="34" charset="-120"/>
               </a:rPr>
-              <a:t>    }</a:t>
+              <a:t xml:space="preserve">    }</a:t>
             </a:r>
             <a:endParaRPr lang="en-US" sz="1000" dirty="0"/>
           </a:p>
@@ -16187,7 +16207,7 @@
                 <a:ea typeface="Consolas" pitchFamily="34" charset="-122"/>
                 <a:cs typeface="Consolas" pitchFamily="34" charset="-120"/>
               </a:rPr>
-              <a:t>    const auto lines = generate_lines();  // const local</a:t>
+              <a:t xml:space="preserve">    const auto lines = generate_lines();  // const local</a:t>
             </a:r>
             <a:endParaRPr lang="en-US" sz="1000" dirty="0"/>
           </a:p>
@@ -16207,7 +16227,7 @@
                 <a:ea typeface="Consolas" pitchFamily="34" charset="-122"/>
                 <a:cs typeface="Consolas" pitchFamily="34" charset="-120"/>
               </a:rPr>
-              <a:t>    // ...</a:t>
+              <a:t xml:space="preserve">    // ...</a:t>
             </a:r>
             <a:endParaRPr lang="en-US" sz="1000" dirty="0"/>
           </a:p>
@@ -16227,7 +16247,7 @@
                 <a:ea typeface="Consolas" pitchFamily="34" charset="-122"/>
                 <a:cs typeface="Consolas" pitchFamily="34" charset="-120"/>
               </a:rPr>
-              <a:t>    return lines;                         // COPIES — cannot move from const</a:t>
+              <a:t xml:space="preserve">    return lines;                         // May copy — move fallback blocked by const</a:t>
             </a:r>
             <a:endParaRPr lang="en-US" sz="1000" dirty="0"/>
           </a:p>
@@ -16415,7 +16435,7 @@
                 <a:ea typeface="Calibri" pitchFamily="34" charset="-122"/>
                 <a:cs typeface="Calibri" pitchFamily="34" charset="-120"/>
               </a:rPr>
-              <a:t>(move constructors take T&amp;&amp;)</a:t>
+              <a:t>NRVO may still fire, but if it doesn't,</a:t>
             </a:r>
             <a:endParaRPr lang="en-US" sz="1100" dirty="0"/>
           </a:p>
@@ -16444,7 +16464,7 @@
                 <a:ea typeface="Calibri" pitchFamily="34" charset="-122"/>
                 <a:cs typeface="Calibri" pitchFamily="34" charset="-120"/>
               </a:rPr>
-              <a:t>Result: copy constructor silently selected.</a:t>
+              <a:t>the fallback is copy, not move.</a:t>
             </a:r>
             <a:endParaRPr lang="en-US" sz="1100" dirty="0"/>
           </a:p>
@@ -16790,7 +16810,7 @@
                 <a:ea typeface="Consolas" pitchFamily="34" charset="-122"/>
                 <a:cs typeface="Consolas" pitchFamily="34" charset="-120"/>
               </a:rPr>
-              <a:t>    auto lines = generate_lines();   // no const</a:t>
+              <a:t xml:space="preserve">    auto lines = generate_lines();   // no const</a:t>
             </a:r>
             <a:endParaRPr lang="en-US" sz="1000" dirty="0"/>
           </a:p>
@@ -16810,7 +16830,7 @@
                 <a:ea typeface="Consolas" pitchFamily="34" charset="-122"/>
                 <a:cs typeface="Consolas" pitchFamily="34" charset="-120"/>
               </a:rPr>
-              <a:t>    return lines;                    // MOVES — constant time</a:t>
+              <a:t xml:space="preserve">    return lines;                    // NRVO or implicit move — no copy</a:t>
             </a:r>
             <a:endParaRPr lang="en-US" sz="1000" dirty="0"/>
           </a:p>
@@ -17130,7 +17150,7 @@
                 <a:ea typeface="Consolas" pitchFamily="34" charset="-122"/>
                 <a:cs typeface="Consolas" pitchFamily="34" charset="-120"/>
               </a:rPr>
-              <a:t>    threads.emplace_back([&amp;doc]() {</a:t>
+              <a:t xml:space="preserve">    threads.emplace_back([&amp;doc]() {</a:t>
             </a:r>
             <a:endParaRPr lang="en-US" sz="1000" dirty="0"/>
           </a:p>
@@ -17150,7 +17170,7 @@
                 <a:ea typeface="Consolas" pitchFamily="34" charset="-122"/>
                 <a:cs typeface="Consolas" pitchFamily="34" charset="-120"/>
               </a:rPr>
-              <a:t>        auto content = doc.get_content();  // OK: doc is const</a:t>
+              <a:t xml:space="preserve">        auto content = doc.get_content();  // OK: doc is const</a:t>
             </a:r>
             <a:endParaRPr lang="en-US" sz="1000" dirty="0"/>
           </a:p>
@@ -17170,7 +17190,7 @@
                 <a:ea typeface="Consolas" pitchFamily="34" charset="-122"/>
                 <a:cs typeface="Consolas" pitchFamily="34" charset="-120"/>
               </a:rPr>
-              <a:t>    });</a:t>
+              <a:t xml:space="preserve">    });</a:t>
             </a:r>
             <a:endParaRPr lang="en-US" sz="1000" dirty="0"/>
           </a:p>
@@ -17318,7 +17338,7 @@
                 <a:ea typeface="Calibri" pitchFamily="34" charset="-122"/>
                 <a:cs typeface="Calibri" pitchFamily="34" charset="-120"/>
               </a:rPr>
-              <a:t>const member functions can be called concurrently from multiple threads.</a:t>
+              <a:t>For standard library types, simultaneous const member function calls are safe as long as no thread performs a non-const operation on the same object.</a:t>
             </a:r>
             <a:endParaRPr lang="en-US" sz="1050" dirty="0"/>
           </a:p>
@@ -17347,7 +17367,7 @@
                 <a:ea typeface="Calibri" pitchFamily="34" charset="-122"/>
                 <a:cs typeface="Calibri" pitchFamily="34" charset="-120"/>
               </a:rPr>
-              <a:t>non-const member functions require exclusive access.</a:t>
+              <a:t>Non-const member functions require exclusive access — no other thread may access the object.</a:t>
             </a:r>
             <a:endParaRPr lang="en-US" sz="1050" dirty="0"/>
           </a:p>
@@ -17431,7 +17451,7 @@
       </p:sp>
       <p:pic>
         <p:nvPicPr>
-          <p:cNvPr id="13" name="Image 0" descr="preencoded.png">    </p:cNvPr>
+          <p:cNvPr id="13" name="Image 0" descr="preencoded.png"/>
           <p:cNvPicPr>
             <a:picLocks noChangeAspect="1"/>
           </p:cNvPicPr>
@@ -17970,7 +17990,7 @@
                 <a:ea typeface="Consolas" pitchFamily="34" charset="-122"/>
                 <a:cs typeface="Consolas" pitchFamily="34" charset="-120"/>
               </a:rPr>
-              <a:t>  string&amp; mut = const_cast&lt;</a:t>
+              <a:t xml:space="preserve">  string&amp; mut = const_cast&lt;</a:t>
             </a:r>
             <a:endParaRPr lang="en-US" sz="950" dirty="0"/>
           </a:p>
@@ -17990,7 +18010,7 @@
                 <a:ea typeface="Consolas" pitchFamily="34" charset="-122"/>
                 <a:cs typeface="Consolas" pitchFamily="34" charset="-120"/>
               </a:rPr>
-              <a:t>      string&amp;&gt;(s);</a:t>
+              <a:t xml:space="preserve">      string&amp;&gt;(s);</a:t>
             </a:r>
             <a:endParaRPr lang="en-US" sz="950" dirty="0"/>
           </a:p>
@@ -18010,7 +18030,7 @@
                 <a:ea typeface="Consolas" pitchFamily="34" charset="-122"/>
                 <a:cs typeface="Consolas" pitchFamily="34" charset="-120"/>
               </a:rPr>
-              <a:t>  mut = "modified";</a:t>
+              <a:t xml:space="preserve">  mut = "modified";</a:t>
             </a:r>
             <a:endParaRPr lang="en-US" sz="950" dirty="0"/>
           </a:p>
@@ -18030,7 +18050,7 @@
                 <a:ea typeface="Consolas" pitchFamily="34" charset="-122"/>
                 <a:cs typeface="Consolas" pitchFamily="34" charset="-120"/>
               </a:rPr>
-              <a:t>  // UB if s was born const!</a:t>
+              <a:t xml:space="preserve">  // UB if s was born const!</a:t>
             </a:r>
             <a:endParaRPr lang="en-US" sz="950" dirty="0"/>
           </a:p>
@@ -18721,7 +18741,7 @@
                 <a:ea typeface="Consolas" pitchFamily="34" charset="-122"/>
                 <a:cs typeface="Consolas" pitchFamily="34" charset="-120"/>
               </a:rPr>
-              <a:t>    std::string name_;</a:t>
+              <a:t xml:space="preserve">    std::string name_;</a:t>
             </a:r>
             <a:endParaRPr lang="en-US" sz="1000" dirty="0"/>
           </a:p>
@@ -18761,7 +18781,7 @@
                 <a:ea typeface="Consolas" pitchFamily="34" charset="-122"/>
                 <a:cs typeface="Consolas" pitchFamily="34" charset="-120"/>
               </a:rPr>
-              <a:t>    string get_name() { return name_; }        // BAD: can't call on const Person</a:t>
+              <a:t xml:space="preserve">    string get_name() { return name_; }        // BAD: can't call on const Person</a:t>
             </a:r>
             <a:endParaRPr lang="en-US" sz="1000" dirty="0"/>
           </a:p>
@@ -18781,7 +18801,7 @@
                 <a:ea typeface="Consolas" pitchFamily="34" charset="-122"/>
                 <a:cs typeface="Consolas" pitchFamily="34" charset="-120"/>
               </a:rPr>
-              <a:t>    string get_name() const { return name_; }  // GOOD: works on any Person</a:t>
+              <a:t xml:space="preserve">    string get_name() const { return name_; }  // GOOD: works on any Person</a:t>
             </a:r>
             <a:endParaRPr lang="en-US" sz="1000" dirty="0"/>
           </a:p>
@@ -18929,7 +18949,7 @@
                 <a:ea typeface="Consolas" pitchFamily="34" charset="-122"/>
                 <a:cs typeface="Consolas" pitchFamily="34" charset="-120"/>
               </a:rPr>
-              <a:t>    std::vector&lt;int&gt; data_;</a:t>
+              <a:t xml:space="preserve">    std::vector&lt;int&gt; data_;</a:t>
             </a:r>
             <a:endParaRPr lang="en-US" sz="1000" dirty="0"/>
           </a:p>
@@ -18969,7 +18989,7 @@
                 <a:ea typeface="Consolas" pitchFamily="34" charset="-122"/>
                 <a:cs typeface="Consolas" pitchFamily="34" charset="-120"/>
               </a:rPr>
-              <a:t>    // GOOD: const overload for read-only access</a:t>
+              <a:t xml:space="preserve">    // GOOD: const overload for read-only access</a:t>
             </a:r>
             <a:endParaRPr lang="en-US" sz="1000" dirty="0"/>
           </a:p>
@@ -18989,7 +19009,7 @@
                 <a:ea typeface="Consolas" pitchFamily="34" charset="-122"/>
                 <a:cs typeface="Consolas" pitchFamily="34" charset="-120"/>
               </a:rPr>
-              <a:t>    const std::vector&lt;int&gt;&amp; get_data() const { return data_; }</a:t>
+              <a:t xml:space="preserve">    const std::vector&lt;int&gt;&amp; get_data() const { return data_; }</a:t>
             </a:r>
             <a:endParaRPr lang="en-US" sz="1000" dirty="0"/>
           </a:p>
@@ -19018,7 +19038,7 @@
                 <a:ea typeface="Consolas" pitchFamily="34" charset="-122"/>
                 <a:cs typeface="Consolas" pitchFamily="34" charset="-120"/>
               </a:rPr>
-              <a:t>    // Non-const overload only if mutable access is genuinely needed</a:t>
+              <a:t xml:space="preserve">    // Non-const overload only if mutable access is genuinely needed</a:t>
             </a:r>
             <a:endParaRPr lang="en-US" sz="1000" dirty="0"/>
           </a:p>
@@ -19038,7 +19058,7 @@
                 <a:ea typeface="Consolas" pitchFamily="34" charset="-122"/>
                 <a:cs typeface="Consolas" pitchFamily="34" charset="-120"/>
               </a:rPr>
-              <a:t>    std::vector&lt;int&gt;&amp; get_data() { return data_; }</a:t>
+              <a:t xml:space="preserve">    std::vector&lt;int&gt;&amp; get_data() { return data_; }</a:t>
             </a:r>
             <a:endParaRPr lang="en-US" sz="1000" dirty="0"/>
           </a:p>
@@ -19058,7 +19078,7 @@
                 <a:ea typeface="Consolas" pitchFamily="34" charset="-122"/>
                 <a:cs typeface="Consolas" pitchFamily="34" charset="-120"/>
               </a:rPr>
-              <a:t>    // ^^^ Caller can now bypass all class invariants — deliberate design choice</a:t>
+              <a:t xml:space="preserve">    // ^^^ Caller can now bypass all class invariants — deliberate design choice</a:t>
             </a:r>
             <a:endParaRPr lang="en-US" sz="1000" dirty="0"/>
           </a:p>
@@ -19357,7 +19377,7 @@
                 <a:ea typeface="Consolas" pitchFamily="34" charset="-122"/>
                 <a:cs typeface="Consolas" pitchFamily="34" charset="-120"/>
               </a:rPr>
-              <a:t>    std::string&amp; mutable_s = const_cast&lt;std::string&amp;&gt;(s);</a:t>
+              <a:t xml:space="preserve">    std::string&amp; mutable_s = const_cast&lt;std::string&amp;&gt;(s);</a:t>
             </a:r>
             <a:endParaRPr lang="en-US" sz="1000" dirty="0"/>
           </a:p>
@@ -19377,7 +19397,7 @@
                 <a:ea typeface="Consolas" pitchFamily="34" charset="-122"/>
                 <a:cs typeface="Consolas" pitchFamily="34" charset="-120"/>
               </a:rPr>
-              <a:t>    mutable_s = "modified";  // UB if s refers to an originally-const object</a:t>
+              <a:t xml:space="preserve">    mutable_s = "modified";  // UB if s refers to an originally-const object</a:t>
             </a:r>
             <a:endParaRPr lang="en-US" sz="1000" dirty="0"/>
           </a:p>
@@ -20157,7 +20177,7 @@
                 <a:ea typeface="Consolas" pitchFamily="34" charset="-122"/>
                 <a:cs typeface="Consolas" pitchFamily="34" charset="-120"/>
               </a:rPr>
-              <a:t>    process(r);  // Did process() modify r? Who knows.</a:t>
+              <a:t xml:space="preserve">    process(r);  // Did process() modify r? Who knows.</a:t>
             </a:r>
             <a:endParaRPr lang="en-US" sz="1050" dirty="0"/>
           </a:p>
@@ -20226,7 +20246,7 @@
                 <a:ea typeface="Consolas" pitchFamily="34" charset="-122"/>
                 <a:cs typeface="Consolas" pitchFamily="34" charset="-120"/>
               </a:rPr>
-              <a:t>    process(r);  // Compile error if process() tries to modify</a:t>
+              <a:t xml:space="preserve">    process(r);  // Compile error if process() tries to modify</a:t>
             </a:r>
             <a:endParaRPr lang="en-US" sz="1050" dirty="0"/>
           </a:p>
@@ -20394,7 +20414,7 @@
                 <a:ea typeface="Consolas" pitchFamily="34" charset="-122"/>
                 <a:cs typeface="Consolas" pitchFamily="34" charset="-120"/>
               </a:rPr>
-              <a:t>    if (item.is_valid()) ++count;  // COMPILE ERROR: count is const</a:t>
+              <a:t xml:space="preserve">    if (item.is_valid()) ++count;  // COMPILE ERROR: count is const</a:t>
             </a:r>
             <a:endParaRPr lang="en-US" sz="1000" dirty="0"/>
           </a:p>
@@ -20483,7 +20503,7 @@
                 <a:ea typeface="Consolas" pitchFamily="34" charset="-122"/>
                 <a:cs typeface="Consolas" pitchFamily="34" charset="-120"/>
               </a:rPr>
-              <a:t>    if (item.is_valid()) ++count;  // OK — but count is a COPY</a:t>
+              <a:t xml:space="preserve">    if (item.is_valid()) ++count;  // OK — but count is a COPY</a:t>
             </a:r>
             <a:endParaRPr lang="en-US" sz="1000" dirty="0"/>
           </a:p>
@@ -20721,7 +20741,7 @@
       </p:sp>
       <p:pic>
         <p:nvPicPr>
-          <p:cNvPr id="5" name="Image 0" descr="preencoded.png">    </p:cNvPr>
+          <p:cNvPr id="5" name="Image 0" descr="preencoded.png"/>
           <p:cNvPicPr>
             <a:picLocks noChangeAspect="1"/>
           </p:cNvPicPr>
@@ -20784,7 +20804,7 @@
       </p:sp>
       <p:pic>
         <p:nvPicPr>
-          <p:cNvPr id="7" name="Image 1" descr="preencoded.png">    </p:cNvPr>
+          <p:cNvPr id="7" name="Image 1" descr="preencoded.png"/>
           <p:cNvPicPr>
             <a:picLocks noChangeAspect="1"/>
           </p:cNvPicPr>
@@ -20847,7 +20867,7 @@
       </p:sp>
       <p:pic>
         <p:nvPicPr>
-          <p:cNvPr id="9" name="Image 2" descr="preencoded.png">    </p:cNvPr>
+          <p:cNvPr id="9" name="Image 2" descr="preencoded.png"/>
           <p:cNvPicPr>
             <a:picLocks noChangeAspect="1"/>
           </p:cNvPicPr>
@@ -20910,7 +20930,7 @@
       </p:sp>
       <p:pic>
         <p:nvPicPr>
-          <p:cNvPr id="11" name="Image 3" descr="preencoded.png">    </p:cNvPr>
+          <p:cNvPr id="11" name="Image 3" descr="preencoded.png"/>
           <p:cNvPicPr>
             <a:picLocks noChangeAspect="1"/>
           </p:cNvPicPr>
@@ -20973,7 +20993,7 @@
       </p:sp>
       <p:pic>
         <p:nvPicPr>
-          <p:cNvPr id="13" name="Image 4" descr="preencoded.png">    </p:cNvPr>
+          <p:cNvPr id="13" name="Image 4" descr="preencoded.png"/>
           <p:cNvPicPr>
             <a:picLocks noChangeAspect="1"/>
           </p:cNvPicPr>
@@ -21036,7 +21056,7 @@
       </p:sp>
       <p:pic>
         <p:nvPicPr>
-          <p:cNvPr id="15" name="Image 5" descr="preencoded.png">    </p:cNvPr>
+          <p:cNvPr id="15" name="Image 5" descr="preencoded.png"/>
           <p:cNvPicPr>
             <a:picLocks noChangeAspect="1"/>
           </p:cNvPicPr>
@@ -21138,7 +21158,7 @@
       </p:sp>
       <p:pic>
         <p:nvPicPr>
-          <p:cNvPr id="18" name="Image 6" descr="preencoded.png">    </p:cNvPr>
+          <p:cNvPr id="18" name="Image 6" descr="preencoded.png"/>
           <p:cNvPicPr>
             <a:picLocks noChangeAspect="1"/>
           </p:cNvPicPr>
@@ -21201,7 +21221,7 @@
       </p:sp>
       <p:pic>
         <p:nvPicPr>
-          <p:cNvPr id="20" name="Image 7" descr="preencoded.png">    </p:cNvPr>
+          <p:cNvPr id="20" name="Image 7" descr="preencoded.png"/>
           <p:cNvPicPr>
             <a:picLocks noChangeAspect="1"/>
           </p:cNvPicPr>
@@ -21264,7 +21284,7 @@
       </p:sp>
       <p:pic>
         <p:nvPicPr>
-          <p:cNvPr id="22" name="Image 8" descr="preencoded.png">    </p:cNvPr>
+          <p:cNvPr id="22" name="Image 8" descr="preencoded.png"/>
           <p:cNvPicPr>
             <a:picLocks noChangeAspect="1"/>
           </p:cNvPicPr>
@@ -21327,7 +21347,7 @@
       </p:sp>
       <p:pic>
         <p:nvPicPr>
-          <p:cNvPr id="24" name="Image 9" descr="preencoded.png">    </p:cNvPr>
+          <p:cNvPr id="24" name="Image 9" descr="preencoded.png"/>
           <p:cNvPicPr>
             <a:picLocks noChangeAspect="1"/>
           </p:cNvPicPr>
@@ -21390,7 +21410,7 @@
       </p:sp>
       <p:pic>
         <p:nvPicPr>
-          <p:cNvPr id="26" name="Image 10" descr="preencoded.png">    </p:cNvPr>
+          <p:cNvPr id="26" name="Image 10" descr="preencoded.png"/>
           <p:cNvPicPr>
             <a:picLocks noChangeAspect="1"/>
           </p:cNvPicPr>
@@ -21453,7 +21473,7 @@
       </p:sp>
       <p:pic>
         <p:nvPicPr>
-          <p:cNvPr id="28" name="Image 11" descr="preencoded.png">    </p:cNvPr>
+          <p:cNvPr id="28" name="Image 11" descr="preencoded.png"/>
           <p:cNvPicPr>
             <a:picLocks noChangeAspect="1"/>
           </p:cNvPicPr>
@@ -21583,7 +21603,7 @@
       </p:sp>
       <p:pic>
         <p:nvPicPr>
-          <p:cNvPr id="33" name="Image 12" descr="preencoded.png">    </p:cNvPr>
+          <p:cNvPr id="33" name="Image 12" descr="preencoded.png"/>
           <p:cNvPicPr>
             <a:picLocks noChangeAspect="1"/>
           </p:cNvPicPr>
@@ -23996,7 +24016,7 @@
                 <a:ea typeface="Consolas" pitchFamily="34" charset="-122"/>
                 <a:cs typeface="Consolas" pitchFamily="34" charset="-120"/>
               </a:rPr>
-              <a:t>    double avg = calculate_average(data);   // Looks harmless...</a:t>
+              <a:t xml:space="preserve">    double avg = calculate_average(data);   // Looks harmless...</a:t>
             </a:r>
             <a:endParaRPr lang="en-US" sz="1000" dirty="0"/>
           </a:p>
@@ -24016,7 +24036,7 @@
                 <a:ea typeface="Consolas" pitchFamily="34" charset="-122"/>
                 <a:cs typeface="Consolas" pitchFamily="34" charset="-120"/>
               </a:rPr>
-              <a:t>    </a:t>
+              <a:t xml:space="preserve">    </a:t>
             </a:r>
             <a:endParaRPr lang="en-US" sz="1000" dirty="0"/>
           </a:p>
@@ -24036,7 +24056,7 @@
                 <a:ea typeface="Consolas" pitchFamily="34" charset="-122"/>
                 <a:cs typeface="Consolas" pitchFamily="34" charset="-120"/>
               </a:rPr>
-              <a:t>    // Later: group by category</a:t>
+              <a:t xml:space="preserve">    // Later: group by category</a:t>
             </a:r>
             <a:endParaRPr lang="en-US" sz="1000" dirty="0"/>
           </a:p>
@@ -24056,7 +24076,7 @@
                 <a:ea typeface="Consolas" pitchFamily="34" charset="-122"/>
                 <a:cs typeface="Consolas" pitchFamily="34" charset="-120"/>
               </a:rPr>
-              <a:t>    std::map&lt;std::string, double&gt; by_category;</a:t>
+              <a:t xml:space="preserve">    std::map&lt;std::string, double&gt; by_category;</a:t>
             </a:r>
             <a:endParaRPr lang="en-US" sz="1000" dirty="0"/>
           </a:p>
@@ -24076,7 +24096,7 @@
                 <a:ea typeface="Consolas" pitchFamily="34" charset="-122"/>
                 <a:cs typeface="Consolas" pitchFamily="34" charset="-120"/>
               </a:rPr>
-              <a:t>    for (const auto&amp; r : data) {</a:t>
+              <a:t xml:space="preserve">    for (const auto&amp; r : data) {</a:t>
             </a:r>
             <a:endParaRPr lang="en-US" sz="1000" dirty="0"/>
           </a:p>
@@ -24096,7 +24116,7 @@
                 <a:ea typeface="Consolas" pitchFamily="34" charset="-122"/>
                 <a:cs typeface="Consolas" pitchFamily="34" charset="-120"/>
               </a:rPr>
-              <a:t>        by_category[r.category] += r.value;</a:t>
+              <a:t xml:space="preserve">        by_category[r.category] += r.value;</a:t>
             </a:r>
             <a:endParaRPr lang="en-US" sz="1000" dirty="0"/>
           </a:p>
@@ -24116,7 +24136,7 @@
                 <a:ea typeface="Consolas" pitchFamily="34" charset="-122"/>
                 <a:cs typeface="Consolas" pitchFamily="34" charset="-120"/>
               </a:rPr>
-              <a:t>        // BUG: categories were lowercased by calculate_average!</a:t>
+              <a:t xml:space="preserve">        // BUG: categories were lowercased by calculate_average!</a:t>
             </a:r>
             <a:endParaRPr lang="en-US" sz="1000" dirty="0"/>
           </a:p>
@@ -24136,7 +24156,7 @@
                 <a:ea typeface="Consolas" pitchFamily="34" charset="-122"/>
                 <a:cs typeface="Consolas" pitchFamily="34" charset="-120"/>
               </a:rPr>
-              <a:t>    }</a:t>
+              <a:t xml:space="preserve">    }</a:t>
             </a:r>
             <a:endParaRPr lang="en-US" sz="1000" dirty="0"/>
           </a:p>
@@ -24156,7 +24176,7 @@
                 <a:ea typeface="Consolas" pitchFamily="34" charset="-122"/>
                 <a:cs typeface="Consolas" pitchFamily="34" charset="-120"/>
               </a:rPr>
-              <a:t>    // "Electronics" became "electronics"</a:t>
+              <a:t xml:space="preserve">    // "Electronics" became "electronics"</a:t>
             </a:r>
             <a:endParaRPr lang="en-US" sz="1000" dirty="0"/>
           </a:p>
@@ -24176,7 +24196,7 @@
                 <a:ea typeface="Consolas" pitchFamily="34" charset="-122"/>
                 <a:cs typeface="Consolas" pitchFamily="34" charset="-120"/>
               </a:rPr>
-              <a:t>    // "FOOD" became "food"</a:t>
+              <a:t xml:space="preserve">    // "FOOD" became "food"</a:t>
             </a:r>
             <a:endParaRPr lang="en-US" sz="1000" dirty="0"/>
           </a:p>
@@ -24196,7 +24216,7 @@
                 <a:ea typeface="Consolas" pitchFamily="34" charset="-122"/>
                 <a:cs typeface="Consolas" pitchFamily="34" charset="-120"/>
               </a:rPr>
-              <a:t>    // Original keys are gone forever</a:t>
+              <a:t xml:space="preserve">    // Original keys are gone forever</a:t>
             </a:r>
             <a:endParaRPr lang="en-US" sz="1000" dirty="0"/>
           </a:p>
@@ -24474,7 +24494,7 @@
       </p:sp>
       <p:pic>
         <p:nvPicPr>
-          <p:cNvPr id="15" name="Image 0" descr="preencoded.png">    </p:cNvPr>
+          <p:cNvPr id="15" name="Image 0" descr="preencoded.png"/>
           <p:cNvPicPr>
             <a:picLocks noChangeAspect="1"/>
           </p:cNvPicPr>
@@ -24545,7 +24565,7 @@
       </p:sp>
       <p:pic>
         <p:nvPicPr>
-          <p:cNvPr id="18" name="Image 1" descr="preencoded.png">    </p:cNvPr>
+          <p:cNvPr id="18" name="Image 1" descr="preencoded.png"/>
           <p:cNvPicPr>
             <a:picLocks noChangeAspect="1"/>
           </p:cNvPicPr>
@@ -24770,7 +24790,7 @@
       </p:sp>
       <p:pic>
         <p:nvPicPr>
-          <p:cNvPr id="6" name="Image 0" descr="preencoded.png">    </p:cNvPr>
+          <p:cNvPr id="6" name="Image 0" descr="preencoded.png"/>
           <p:cNvPicPr>
             <a:picLocks noChangeAspect="1"/>
           </p:cNvPicPr>
@@ -25062,7 +25082,7 @@
       </p:sp>
       <p:pic>
         <p:nvPicPr>
-          <p:cNvPr id="11" name="Image 1" descr="preencoded.png">    </p:cNvPr>
+          <p:cNvPr id="11" name="Image 1" descr="preencoded.png"/>
           <p:cNvPicPr>
             <a:picLocks noChangeAspect="1"/>
           </p:cNvPicPr>
@@ -25684,7 +25704,7 @@
                 <a:ea typeface="Consolas" pitchFamily="34" charset="-122"/>
                 <a:cs typeface="Consolas" pitchFamily="34" charset="-120"/>
               </a:rPr>
-              <a:t>    std::vector&lt;Record&gt;&amp; records</a:t>
+              <a:t xml:space="preserve">    std::vector&lt;Record&gt;&amp; records</a:t>
             </a:r>
             <a:endParaRPr lang="en-US" sz="1000" dirty="0"/>
           </a:p>
@@ -25724,7 +25744,7 @@
                 <a:ea typeface="Consolas" pitchFamily="34" charset="-122"/>
                 <a:cs typeface="Consolas" pitchFamily="34" charset="-120"/>
               </a:rPr>
-              <a:t>    for (auto&amp; r : records) {</a:t>
+              <a:t xml:space="preserve">    for (auto&amp; r : records) {</a:t>
             </a:r>
             <a:endParaRPr lang="en-US" sz="1000" dirty="0"/>
           </a:p>
@@ -25744,7 +25764,7 @@
                 <a:ea typeface="Consolas" pitchFamily="34" charset="-122"/>
                 <a:cs typeface="Consolas" pitchFamily="34" charset="-120"/>
               </a:rPr>
-              <a:t>        std::transform(...);  // Compiles!</a:t>
+              <a:t xml:space="preserve">        std::transform(...);  // Compiles!</a:t>
             </a:r>
             <a:endParaRPr lang="en-US" sz="1000" dirty="0"/>
           </a:p>
@@ -25764,7 +25784,7 @@
                 <a:ea typeface="Consolas" pitchFamily="34" charset="-122"/>
                 <a:cs typeface="Consolas" pitchFamily="34" charset="-120"/>
               </a:rPr>
-              <a:t>    }</a:t>
+              <a:t xml:space="preserve">    }</a:t>
             </a:r>
             <a:endParaRPr lang="en-US" sz="1000" dirty="0"/>
           </a:p>
@@ -25784,7 +25804,7 @@
                 <a:ea typeface="Consolas" pitchFamily="34" charset="-122"/>
                 <a:cs typeface="Consolas" pitchFamily="34" charset="-120"/>
               </a:rPr>
-              <a:t>    // ...</a:t>
+              <a:t xml:space="preserve">    // ...</a:t>
             </a:r>
             <a:endParaRPr lang="en-US" sz="1000" dirty="0"/>
           </a:p>
@@ -25932,7 +25952,7 @@
                 <a:ea typeface="Consolas" pitchFamily="34" charset="-122"/>
                 <a:cs typeface="Consolas" pitchFamily="34" charset="-120"/>
               </a:rPr>
-              <a:t>    const std::vector&lt;Record&gt;&amp; records</a:t>
+              <a:t xml:space="preserve">    const std::vector&lt;Record&gt;&amp; records</a:t>
             </a:r>
             <a:endParaRPr lang="en-US" sz="1000" dirty="0"/>
           </a:p>
@@ -25972,7 +25992,7 @@
                 <a:ea typeface="Consolas" pitchFamily="34" charset="-122"/>
                 <a:cs typeface="Consolas" pitchFamily="34" charset="-120"/>
               </a:rPr>
-              <a:t>    for (auto&amp; r : records) {</a:t>
+              <a:t xml:space="preserve">    for (auto&amp; r : records) {</a:t>
             </a:r>
             <a:endParaRPr lang="en-US" sz="1000" dirty="0"/>
           </a:p>
@@ -25992,7 +26012,7 @@
                 <a:ea typeface="Consolas" pitchFamily="34" charset="-122"/>
                 <a:cs typeface="Consolas" pitchFamily="34" charset="-120"/>
               </a:rPr>
-              <a:t>        std::transform(...);  // COMPILE ERROR!</a:t>
+              <a:t xml:space="preserve">        std::transform(...);  // COMPILE ERROR!</a:t>
             </a:r>
             <a:endParaRPr lang="en-US" sz="1000" dirty="0"/>
           </a:p>
@@ -26012,7 +26032,7 @@
                 <a:ea typeface="Consolas" pitchFamily="34" charset="-122"/>
                 <a:cs typeface="Consolas" pitchFamily="34" charset="-120"/>
               </a:rPr>
-              <a:t>    }</a:t>
+              <a:t xml:space="preserve">    }</a:t>
             </a:r>
             <a:endParaRPr lang="en-US" sz="1000" dirty="0"/>
           </a:p>
@@ -26032,7 +26052,7 @@
                 <a:ea typeface="Consolas" pitchFamily="34" charset="-122"/>
                 <a:cs typeface="Consolas" pitchFamily="34" charset="-120"/>
               </a:rPr>
-              <a:t>    // ...</a:t>
+              <a:t xml:space="preserve">    // ...</a:t>
             </a:r>
             <a:endParaRPr lang="en-US" sz="1000" dirty="0"/>
           </a:p>
@@ -26146,7 +26166,7 @@
       </p:sp>
       <p:pic>
         <p:nvPicPr>
-          <p:cNvPr id="14" name="Image 0" descr="preencoded.png">    </p:cNvPr>
+          <p:cNvPr id="14" name="Image 0" descr="preencoded.png"/>
           <p:cNvPicPr>
             <a:picLocks noChangeAspect="1"/>
           </p:cNvPicPr>
@@ -26441,6 +26461,26 @@
                 <a:ea typeface="Consolas" pitchFamily="34" charset="-122"/>
                 <a:cs typeface="Consolas" pitchFamily="34" charset="-120"/>
               </a:rPr>
+              <a:t>// Precondition: records is non-empty</a:t>
+            </a:r>
+            <a:endParaRPr lang="en-US" sz="900" dirty="0"/>
+          </a:p>
+          <a:p>
+            <a:pPr indent="0" marL="0">
+              <a:lnSpc>
+                <a:spcPct val="115000"/>
+              </a:lnSpc>
+              <a:buNone/>
+            </a:pPr>
+            <a:r>
+              <a:rPr lang="en-US" sz="900" dirty="0">
+                <a:solidFill>
+                  <a:srgbClr val="D4D4D4"/>
+                </a:solidFill>
+                <a:latin typeface="Consolas" pitchFamily="49" charset="0"/>
+                <a:ea typeface="Consolas" pitchFamily="49" charset="0"/>
+                <a:cs typeface="Consolas" pitchFamily="49" charset="0"/>
+              </a:rPr>
               <a:t>double calculate_average(const std::vector&lt;Record&gt;&amp; records) {</a:t>
             </a:r>
             <a:endParaRPr lang="en-US" sz="1000" dirty="0"/>
@@ -26461,7 +26501,7 @@
                 <a:ea typeface="Consolas" pitchFamily="34" charset="-122"/>
                 <a:cs typeface="Consolas" pitchFamily="34" charset="-120"/>
               </a:rPr>
-              <a:t>    double sum = 0;</a:t>
+              <a:t xml:space="preserve">    double sum = 0;</a:t>
             </a:r>
             <a:endParaRPr lang="en-US" sz="1000" dirty="0"/>
           </a:p>
@@ -26481,7 +26521,7 @@
                 <a:ea typeface="Consolas" pitchFamily="34" charset="-122"/>
                 <a:cs typeface="Consolas" pitchFamily="34" charset="-120"/>
               </a:rPr>
-              <a:t>    for (const auto&amp; r : records) {</a:t>
+              <a:t xml:space="preserve">    for (const auto&amp; r : records) {</a:t>
             </a:r>
             <a:endParaRPr lang="en-US" sz="1000" dirty="0"/>
           </a:p>
@@ -26501,7 +26541,7 @@
                 <a:ea typeface="Consolas" pitchFamily="34" charset="-122"/>
                 <a:cs typeface="Consolas" pitchFamily="34" charset="-120"/>
               </a:rPr>
-              <a:t>        sum += r.value;</a:t>
+              <a:t xml:space="preserve">        sum += r.value;</a:t>
             </a:r>
             <a:endParaRPr lang="en-US" sz="1000" dirty="0"/>
           </a:p>
@@ -26521,7 +26561,7 @@
                 <a:ea typeface="Consolas" pitchFamily="34" charset="-122"/>
                 <a:cs typeface="Consolas" pitchFamily="34" charset="-120"/>
               </a:rPr>
-              <a:t>    }</a:t>
+              <a:t xml:space="preserve">    }</a:t>
             </a:r>
             <a:endParaRPr lang="en-US" sz="1000" dirty="0"/>
           </a:p>
@@ -26541,7 +26581,7 @@
                 <a:ea typeface="Consolas" pitchFamily="34" charset="-122"/>
                 <a:cs typeface="Consolas" pitchFamily="34" charset="-120"/>
               </a:rPr>
-              <a:t>    return sum / records.size();</a:t>
+              <a:t xml:space="preserve">    return sum / records.size();</a:t>
             </a:r>
             <a:endParaRPr lang="en-US" sz="1000" dirty="0"/>
           </a:p>
@@ -26670,7 +26710,7 @@
                 <a:ea typeface="Consolas" pitchFamily="34" charset="-122"/>
                 <a:cs typeface="Consolas" pitchFamily="34" charset="-120"/>
               </a:rPr>
-              <a:t>    for (auto&amp; r : records) {</a:t>
+              <a:t xml:space="preserve">    for (auto&amp; r : records) {</a:t>
             </a:r>
             <a:endParaRPr lang="en-US" sz="1000" dirty="0"/>
           </a:p>
@@ -26690,7 +26730,7 @@
                 <a:ea typeface="Consolas" pitchFamily="34" charset="-122"/>
                 <a:cs typeface="Consolas" pitchFamily="34" charset="-120"/>
               </a:rPr>
-              <a:t>        std::transform(r.category.begin(), r.category.end(),</a:t>
+              <a:t xml:space="preserve">        std::transform(r.category.begin(), r.category.end(),</a:t>
             </a:r>
             <a:endParaRPr lang="en-US" sz="1000" dirty="0"/>
           </a:p>
@@ -26710,7 +26750,7 @@
                 <a:ea typeface="Consolas" pitchFamily="34" charset="-122"/>
                 <a:cs typeface="Consolas" pitchFamily="34" charset="-120"/>
               </a:rPr>
-              <a:t>                       r.category.begin(),</a:t>
+              <a:t xml:space="preserve">                       r.category.begin(),</a:t>
             </a:r>
             <a:endParaRPr lang="en-US" sz="1000" dirty="0"/>
           </a:p>
@@ -26730,7 +26770,7 @@
                 <a:ea typeface="Consolas" pitchFamily="34" charset="-122"/>
                 <a:cs typeface="Consolas" pitchFamily="34" charset="-120"/>
               </a:rPr>
-              <a:t>                       [](unsigned char c) { return std::tolower(c); });</a:t>
+              <a:t xml:space="preserve">                       [](unsigned char c) { return static_cast&lt;char&gt;(std::tolower(c)); });</a:t>
             </a:r>
             <a:endParaRPr lang="en-US" sz="1000" dirty="0"/>
           </a:p>
@@ -26750,7 +26790,7 @@
                 <a:ea typeface="Consolas" pitchFamily="34" charset="-122"/>
                 <a:cs typeface="Consolas" pitchFamily="34" charset="-120"/>
               </a:rPr>
-              <a:t>    }</a:t>
+              <a:t xml:space="preserve">    }</a:t>
             </a:r>
             <a:endParaRPr lang="en-US" sz="1000" dirty="0"/>
           </a:p>
@@ -26825,7 +26865,7 @@
       </p:sp>
       <p:pic>
         <p:nvPicPr>
-          <p:cNvPr id="11" name="Image 0" descr="preencoded.png">    </p:cNvPr>
+          <p:cNvPr id="11" name="Image 0" descr="preencoded.png"/>
           <p:cNvPicPr>
             <a:picLocks noChangeAspect="1"/>
           </p:cNvPicPr>
@@ -29439,7 +29479,7 @@
                 <a:ea typeface="Calibri" pitchFamily="34" charset="-122"/>
                 <a:cs typeface="Calibri" pitchFamily="34" charset="-120"/>
               </a:rPr>
-              <a:t>Catches accidental assignment to the wrong parameter</a:t>
+              <a:t>Catches accidental assignment to the wrong parameter (doesn’t change the function’s type/signature — purely an intent tool inside the body)</a:t>
             </a:r>
             <a:endParaRPr lang="en-US" sz="1200" dirty="0"/>
           </a:p>
@@ -29548,7 +29588,7 @@
                 <a:ea typeface="Consolas" pitchFamily="34" charset="-122"/>
                 <a:cs typeface="Consolas" pitchFamily="34" charset="-120"/>
               </a:rPr>
-              <a:t>    t = std::clamp(t, 0.0, b);  // Oops: 'b' instead of '1.0'</a:t>
+              <a:t xml:space="preserve">    t = std::clamp(t, 0.0, b);  // Oops: 'b' instead of '1.0'</a:t>
             </a:r>
             <a:endParaRPr lang="en-US" sz="1000" dirty="0"/>
           </a:p>
@@ -29568,7 +29608,7 @@
                 <a:ea typeface="Consolas" pitchFamily="34" charset="-122"/>
                 <a:cs typeface="Consolas" pitchFamily="34" charset="-120"/>
               </a:rPr>
-              <a:t>    return a + t * (b - a);     // Produces plausible but wrong results</a:t>
+              <a:t xml:space="preserve">    return a + t * (b - a);     // Produces plausible but wrong results</a:t>
             </a:r>
             <a:endParaRPr lang="en-US" sz="1000" dirty="0"/>
           </a:p>
@@ -29596,7 +29636,7 @@
       </p:sp>
       <p:pic>
         <p:nvPicPr>
-          <p:cNvPr id="7" name="Image 0" descr="preencoded.png">    </p:cNvPr>
+          <p:cNvPr id="7" name="Image 0" descr="preencoded.png"/>
           <p:cNvPicPr>
             <a:picLocks noChangeAspect="1"/>
           </p:cNvPicPr>
@@ -29721,7 +29761,7 @@
                 <a:ea typeface="Consolas" pitchFamily="34" charset="-122"/>
                 <a:cs typeface="Consolas" pitchFamily="34" charset="-120"/>
               </a:rPr>
-              <a:t>    t = std::clamp(t, 0.0, b);  // COMPILE ERROR: cannot assign to const</a:t>
+              <a:t xml:space="preserve">    t = std::clamp(t, 0.0, b);  // COMPILE ERROR: cannot assign to const</a:t>
             </a:r>
             <a:endParaRPr lang="en-US" sz="1000" dirty="0"/>
           </a:p>
@@ -29741,7 +29781,7 @@
                 <a:ea typeface="Consolas" pitchFamily="34" charset="-122"/>
                 <a:cs typeface="Consolas" pitchFamily="34" charset="-120"/>
               </a:rPr>
-              <a:t>    return a + t * (b - a);</a:t>
+              <a:t xml:space="preserve">    return a + t * (b - a);</a:t>
             </a:r>
             <a:endParaRPr lang="en-US" sz="1000" dirty="0"/>
           </a:p>
@@ -29769,7 +29809,7 @@
       </p:sp>
       <p:pic>
         <p:nvPicPr>
-          <p:cNvPr id="10" name="Image 1" descr="preencoded.png">    </p:cNvPr>
+          <p:cNvPr id="10" name="Image 1" descr="preencoded.png"/>
           <p:cNvPicPr>
             <a:picLocks noChangeAspect="1"/>
           </p:cNvPicPr>
@@ -29894,7 +29934,7 @@
                 <a:ea typeface="Consolas" pitchFamily="34" charset="-122"/>
                 <a:cs typeface="Consolas" pitchFamily="34" charset="-120"/>
               </a:rPr>
-              <a:t>    const double clamped = std::clamp(t, 0.0, 1.0);</a:t>
+              <a:t xml:space="preserve">    const double clamped = std::clamp(t, 0.0, 1.0);</a:t>
             </a:r>
             <a:endParaRPr lang="en-US" sz="1000" dirty="0"/>
           </a:p>
@@ -29914,7 +29954,7 @@
                 <a:ea typeface="Consolas" pitchFamily="34" charset="-122"/>
                 <a:cs typeface="Consolas" pitchFamily="34" charset="-120"/>
               </a:rPr>
-              <a:t>    return a + clamped * (b - a);</a:t>
+              <a:t xml:space="preserve">    return a + clamped * (b - a);</a:t>
             </a:r>
             <a:endParaRPr lang="en-US" sz="1000" dirty="0"/>
           </a:p>
@@ -30213,7 +30253,7 @@
                 <a:ea typeface="Consolas" pitchFamily="34" charset="-122"/>
                 <a:cs typeface="Consolas" pitchFamily="34" charset="-120"/>
               </a:rPr>
-              <a:t>    std::vector&lt;int&gt;&amp; v) {</a:t>
+              <a:t xml:space="preserve">    std::vector&lt;int&gt;&amp; v) {</a:t>
             </a:r>
             <a:endParaRPr lang="en-US" sz="1000" dirty="0"/>
           </a:p>
@@ -30233,7 +30273,7 @@
                 <a:ea typeface="Consolas" pitchFamily="34" charset="-122"/>
                 <a:cs typeface="Consolas" pitchFamily="34" charset="-120"/>
               </a:rPr>
-              <a:t>  int total = 0;</a:t>
+              <a:t xml:space="preserve">  int total = 0;</a:t>
             </a:r>
             <a:endParaRPr lang="en-US" sz="1000" dirty="0"/>
           </a:p>
@@ -30253,7 +30293,7 @@
                 <a:ea typeface="Consolas" pitchFamily="34" charset="-122"/>
                 <a:cs typeface="Consolas" pitchFamily="34" charset="-120"/>
               </a:rPr>
-              <a:t>  for (int x : v) total += x;</a:t>
+              <a:t xml:space="preserve">  for (int x : v) total += x;</a:t>
             </a:r>
             <a:endParaRPr lang="en-US" sz="1000" dirty="0"/>
           </a:p>
@@ -30273,7 +30313,7 @@
                 <a:ea typeface="Consolas" pitchFamily="34" charset="-122"/>
                 <a:cs typeface="Consolas" pitchFamily="34" charset="-120"/>
               </a:rPr>
-              <a:t>  return total + v.size();</a:t>
+              <a:t xml:space="preserve">  return total + v.size();</a:t>
             </a:r>
             <a:endParaRPr lang="en-US" sz="1000" dirty="0"/>
           </a:p>
@@ -30293,7 +30333,7 @@
                 <a:ea typeface="Consolas" pitchFamily="34" charset="-122"/>
                 <a:cs typeface="Consolas" pitchFamily="34" charset="-120"/>
               </a:rPr>
-              <a:t>  // must reload size — did</a:t>
+              <a:t xml:space="preserve">  // must reload size — did</a:t>
             </a:r>
             <a:endParaRPr lang="en-US" sz="1000" dirty="0"/>
           </a:p>
@@ -30313,7 +30353,7 @@
                 <a:ea typeface="Consolas" pitchFamily="34" charset="-122"/>
                 <a:cs typeface="Consolas" pitchFamily="34" charset="-120"/>
               </a:rPr>
-              <a:t>  // the loop modify v?</a:t>
+              <a:t xml:space="preserve">  // the loop modify v?</a:t>
             </a:r>
             <a:endParaRPr lang="en-US" sz="1000" dirty="0"/>
           </a:p>
@@ -30461,7 +30501,7 @@
                 <a:ea typeface="Consolas" pitchFamily="34" charset="-122"/>
                 <a:cs typeface="Consolas" pitchFamily="34" charset="-120"/>
               </a:rPr>
-              <a:t>    const std::vector&lt;int&gt;&amp; v) {</a:t>
+              <a:t xml:space="preserve">    const std::vector&lt;int&gt;&amp; v) {</a:t>
             </a:r>
             <a:endParaRPr lang="en-US" sz="1000" dirty="0"/>
           </a:p>
@@ -30481,7 +30521,7 @@
                 <a:ea typeface="Consolas" pitchFamily="34" charset="-122"/>
                 <a:cs typeface="Consolas" pitchFamily="34" charset="-120"/>
               </a:rPr>
-              <a:t>  int total = 0;</a:t>
+              <a:t xml:space="preserve">  int total = 0;</a:t>
             </a:r>
             <a:endParaRPr lang="en-US" sz="1000" dirty="0"/>
           </a:p>
@@ -30501,7 +30541,7 @@
                 <a:ea typeface="Consolas" pitchFamily="34" charset="-122"/>
                 <a:cs typeface="Consolas" pitchFamily="34" charset="-120"/>
               </a:rPr>
-              <a:t>  for (int x : v) total += x;</a:t>
+              <a:t xml:space="preserve">  for (int x : v) total += x;</a:t>
             </a:r>
             <a:endParaRPr lang="en-US" sz="1000" dirty="0"/>
           </a:p>
@@ -30521,7 +30561,7 @@
                 <a:ea typeface="Consolas" pitchFamily="34" charset="-122"/>
                 <a:cs typeface="Consolas" pitchFamily="34" charset="-120"/>
               </a:rPr>
-              <a:t>  return total + v.size();</a:t>
+              <a:t xml:space="preserve">  return total + v.size();</a:t>
             </a:r>
             <a:endParaRPr lang="en-US" sz="1000" dirty="0"/>
           </a:p>
@@ -30541,7 +30581,7 @@
                 <a:ea typeface="Consolas" pitchFamily="34" charset="-122"/>
                 <a:cs typeface="Consolas" pitchFamily="34" charset="-120"/>
               </a:rPr>
-              <a:t>  // size cached from before</a:t>
+              <a:t xml:space="preserve">  // size cached from before</a:t>
             </a:r>
             <a:endParaRPr lang="en-US" sz="1000" dirty="0"/>
           </a:p>
@@ -30561,7 +30601,7 @@
                 <a:ea typeface="Consolas" pitchFamily="34" charset="-122"/>
                 <a:cs typeface="Consolas" pitchFamily="34" charset="-120"/>
               </a:rPr>
-              <a:t>  // the loop — stays in register</a:t>
+              <a:t xml:space="preserve">  // the loop — stays in register</a:t>
             </a:r>
             <a:endParaRPr lang="en-US" sz="1000" dirty="0"/>
           </a:p>
